--- a/curso_es/pptx/S67.pptx
+++ b/curso_es/pptx/S67.pptx
@@ -4522,7 +4522,7 @@
                 </a:solidFill>
                 <a:latin typeface="Nunito Sans"/>
               </a:rPr>
-              <a:t>Naiara lee: «La humanidad usa 1,7 planetas». Piensa: «Es un dato exacto, como el peso de mi mochila».</a:t>
+              <a:t>Una chica lee: «La humanidad usa 1,7 planetas». Piensa: «Es un dato exacto, como el peso de mi mochila».</a:t>
             </a:r>
           </a:p>
         </p:txBody>
@@ -4849,7 +4849,7 @@
                 </a:solidFill>
                 <a:latin typeface="Nunito Sans"/>
               </a:rPr>
-              <a:t>Omar razona: «Si usamos 1,7 planetas y solo hay uno, el dato es falso. No se puede gastar más de lo que hay».</a:t>
+              <a:t>Un chico razona: «Si usamos 1,7 planetas y solo hay uno, el dato es falso. No se puede gastar más de lo que hay».</a:t>
             </a:r>
           </a:p>
         </p:txBody>
@@ -4897,7 +4897,7 @@
                 </a:solidFill>
                 <a:latin typeface="Nunito Sans"/>
               </a:rPr>
-              <a:t>¿Tiene razón Omar?</a:t>
+              <a:t>¿Tiene razón ese chico?</a:t>
             </a:r>
           </a:p>
           <a:p>
@@ -6140,7 +6140,7 @@
                 </a:solidFill>
                 <a:latin typeface="Nunito Sans"/>
               </a:rPr>
-              <a:t>En el experimento de Tajfel, los grupos se hicieron al ______, y aun así la mayoría favorecía al suyo.  (sesión 66)</a:t>
+              <a:t>En el experimento de los dos grupos hechos a suertes, la mayoría favorecía al ______.  (sesión 66)</a:t>
             </a:r>
           </a:p>
           <a:p>
@@ -6342,7 +6342,7 @@
                 </a:solidFill>
                 <a:latin typeface="Nunito Sans"/>
               </a:rPr>
-              <a:t>En el experimento de Tajfel, los grupos se hicieron al </a:t>
+              <a:t>En el experimento de los dos grupos hechos a suertes, la mayoría favorecía al </a:t>
             </a:r>
             <a:r>
               <a:rPr sz="2600" b="1">
@@ -6351,7 +6351,7 @@
                 </a:solidFill>
                 <a:latin typeface="Nunito Sans"/>
               </a:rPr>
-              <a:t>azar</a:t>
+              <a:t>suyo</a:t>
             </a:r>
             <a:r>
               <a:rPr sz="2600" b="0">
@@ -6360,7 +6360,7 @@
                 </a:solidFill>
                 <a:latin typeface="Nunito Sans"/>
               </a:rPr>
-              <a:t>, y aun así la mayoría favorecía al suyo.  (sesión 66)</a:t>
+              <a:t>.  (sesión 66)</a:t>
             </a:r>
           </a:p>
           <a:p>
